--- a/E-HAZID Copilot Transformation_1.pptx
+++ b/E-HAZID Copilot Transformation_1.pptx
@@ -14,7 +14,7 @@
   <p:notesSz cx="6858000" cy="9144000"/>
   <p:embeddedFontLst>
     <p:embeddedFont>
-      <p:font typeface="Inter" panose="02000503000000020004" pitchFamily="2" charset="0"/>
+      <p:font typeface="Inter" panose="020B0604020202020204" charset="0"/>
       <p:regular r:id="rId6"/>
       <p:bold r:id="rId7"/>
     </p:embeddedFont>
@@ -312,7 +312,7 @@
           <a:p>
             <a:fld id="{5BCAD085-E8A6-8845-BD4E-CB4CCA059FC4}" type="datetimeFigureOut">
               <a:rPr lang="en-US" smtClean="0"/>
-              <a:t>9/27/2026</a:t>
+              <a:t>9/28/2026</a:t>
             </a:fld>
             <a:endParaRPr lang="en-US"/>
           </a:p>
@@ -480,7 +480,7 @@
           <a:p>
             <a:fld id="{5BCAD085-E8A6-8845-BD4E-CB4CCA059FC4}" type="datetimeFigureOut">
               <a:rPr lang="en-US" smtClean="0"/>
-              <a:t>9/27/2026</a:t>
+              <a:t>9/28/2026</a:t>
             </a:fld>
             <a:endParaRPr lang="en-US"/>
           </a:p>
@@ -658,7 +658,7 @@
           <a:p>
             <a:fld id="{5BCAD085-E8A6-8845-BD4E-CB4CCA059FC4}" type="datetimeFigureOut">
               <a:rPr lang="en-US" smtClean="0"/>
-              <a:t>9/27/2026</a:t>
+              <a:t>9/28/2026</a:t>
             </a:fld>
             <a:endParaRPr lang="en-US"/>
           </a:p>
@@ -826,7 +826,7 @@
           <a:p>
             <a:fld id="{5BCAD085-E8A6-8845-BD4E-CB4CCA059FC4}" type="datetimeFigureOut">
               <a:rPr lang="en-US" smtClean="0"/>
-              <a:t>9/27/2026</a:t>
+              <a:t>9/28/2026</a:t>
             </a:fld>
             <a:endParaRPr lang="en-US"/>
           </a:p>
@@ -1071,7 +1071,7 @@
           <a:p>
             <a:fld id="{5BCAD085-E8A6-8845-BD4E-CB4CCA059FC4}" type="datetimeFigureOut">
               <a:rPr lang="en-US" smtClean="0"/>
-              <a:t>9/27/2026</a:t>
+              <a:t>9/28/2026</a:t>
             </a:fld>
             <a:endParaRPr lang="en-US"/>
           </a:p>
@@ -1356,7 +1356,7 @@
           <a:p>
             <a:fld id="{5BCAD085-E8A6-8845-BD4E-CB4CCA059FC4}" type="datetimeFigureOut">
               <a:rPr lang="en-US" smtClean="0"/>
-              <a:t>9/27/2026</a:t>
+              <a:t>9/28/2026</a:t>
             </a:fld>
             <a:endParaRPr lang="en-US"/>
           </a:p>
@@ -1775,7 +1775,7 @@
           <a:p>
             <a:fld id="{5BCAD085-E8A6-8845-BD4E-CB4CCA059FC4}" type="datetimeFigureOut">
               <a:rPr lang="en-US" smtClean="0"/>
-              <a:t>9/27/2026</a:t>
+              <a:t>9/28/2026</a:t>
             </a:fld>
             <a:endParaRPr lang="en-US"/>
           </a:p>
@@ -1892,7 +1892,7 @@
           <a:p>
             <a:fld id="{5BCAD085-E8A6-8845-BD4E-CB4CCA059FC4}" type="datetimeFigureOut">
               <a:rPr lang="en-US" smtClean="0"/>
-              <a:t>9/27/2026</a:t>
+              <a:t>9/28/2026</a:t>
             </a:fld>
             <a:endParaRPr lang="en-US"/>
           </a:p>
@@ -1987,7 +1987,7 @@
           <a:p>
             <a:fld id="{5BCAD085-E8A6-8845-BD4E-CB4CCA059FC4}" type="datetimeFigureOut">
               <a:rPr lang="en-US" smtClean="0"/>
-              <a:t>9/27/2026</a:t>
+              <a:t>9/28/2026</a:t>
             </a:fld>
             <a:endParaRPr lang="en-US"/>
           </a:p>
@@ -2262,7 +2262,7 @@
           <a:p>
             <a:fld id="{5BCAD085-E8A6-8845-BD4E-CB4CCA059FC4}" type="datetimeFigureOut">
               <a:rPr lang="en-US" smtClean="0"/>
-              <a:t>9/27/2026</a:t>
+              <a:t>9/28/2026</a:t>
             </a:fld>
             <a:endParaRPr lang="en-US"/>
           </a:p>
@@ -2514,7 +2514,7 @@
           <a:p>
             <a:fld id="{5BCAD085-E8A6-8845-BD4E-CB4CCA059FC4}" type="datetimeFigureOut">
               <a:rPr lang="en-US" smtClean="0"/>
-              <a:t>9/27/2026</a:t>
+              <a:t>9/28/2026</a:t>
             </a:fld>
             <a:endParaRPr lang="en-US"/>
           </a:p>
@@ -2725,7 +2725,7 @@
           <a:p>
             <a:fld id="{5BCAD085-E8A6-8845-BD4E-CB4CCA059FC4}" type="datetimeFigureOut">
               <a:rPr lang="en-US" smtClean="0"/>
-              <a:t>9/27/2026</a:t>
+              <a:t>9/28/2026</a:t>
             </a:fld>
             <a:endParaRPr lang="en-US"/>
           </a:p>
@@ -7896,4 +7896,10 @@
   </a:objectDefaults>
   <a:extraClrSchemeLst/>
 </a:theme>
+</file>
+
+<file path=docMetadata/LabelInfo.xml><?xml version="1.0" encoding="utf-8"?>
+<clbl:labelList xmlns:clbl="http://schemas.microsoft.com/office/2020/mipLabelMetadata">
+  <clbl:label id="{db1e96a8-a3da-442a-930b-235cac24cd5c}" enabled="0" method="" siteId="{db1e96a8-a3da-442a-930b-235cac24cd5c}" removed="1"/>
+</clbl:labelList>
 </file>